--- a/10-plantas/01-steelmaking/05-capacitacion/MM-EAF-04/MM-EAF-04_Capacitacion_AMMX.pptx
+++ b/10-plantas/01-steelmaking/05-capacitacion/MM-EAF-04/MM-EAF-04_Capacitacion_AMMX.pptx
@@ -18084,7 +18084,7 @@
                 <a:ea typeface="Calibri" pitchFamily="34" charset="-122"/>
                 <a:cs typeface="Calibri" pitchFamily="34" charset="-120"/>
               </a:rPr>
-              <a:t>Siguiente paso: OJT supervisado y evaluación práctica (TD-P07); registro en IMaS y DC-3/SIRCE. Validación: pendiente.</a:t>
+              <a:t>Siguiente paso: OJT supervisado y evaluación práctica (TD-P07); registro en IMaS y DC-3/SIRCE. Validación: visto bueno técnica, seguridad, laboral, diseño instruccional.</a:t>
             </a:r>
             <a:endParaRPr lang="en-US" sz="750" dirty="0"/>
           </a:p>
@@ -19334,7 +19334,7 @@
                 <a:ea typeface="Century Gothic" pitchFamily="34" charset="-122"/>
                 <a:cs typeface="Century Gothic" pitchFamily="34" charset="-120"/>
               </a:rPr>
-              <a:t>Leer aceite, gases y pruebas</a:t>
+              <a:t>Evaluar aceite, gases y pruebas</a:t>
             </a:r>
             <a:endParaRPr lang="en-US" sz="1350" dirty="0"/>
           </a:p>
@@ -23456,7 +23456,7 @@
                 <a:ea typeface="Century Gothic" pitchFamily="34" charset="-122"/>
                 <a:cs typeface="Century Gothic" pitchFamily="34" charset="-120"/>
               </a:rPr>
-              <a:t>Nueve equipos; las protecciones deben estar probadas</a:t>
+              <a:t>Equipos en servicio solo con protecciones probadas</a:t>
             </a:r>
             <a:endParaRPr lang="en-US" sz="2400" dirty="0"/>
           </a:p>
@@ -30946,7 +30946,7 @@
                           <a:ea typeface="Century Gothic" pitchFamily="34" charset="-122"/>
                           <a:cs typeface="Century Gothic" pitchFamily="34" charset="-120"/>
                         </a:rPr>
-                        <a:t>560–620 kWh/t</a:t>
+                        <a:t>560 kWh/t (520–600)</a:t>
                       </a:r>
                       <a:endParaRPr lang="en-US" sz="1050" dirty="0">
                         <a:latin typeface="Century Gothic" charset="0"/>
